--- a/docs/free-rwe-resources/train-the-trainer/training/day-02-vocab-dqd/kit/Instructor-Deck-with-Notes.pptx
+++ b/docs/free-rwe-resources/train-the-trainer/training/day-02-vocab-dqd/kit/Instructor-Deck-with-Notes.pptx
@@ -522,7 +522,7 @@
           <a:lstStyle/>
           <a:p>
             <a:r>
-              <a:t>A useful framing: data quality is always relative to the study question. A 10% rate of unmapped drug codes may have little effect on a study that uses no drug data, and it can undermine a pharmacoepidemiology study.</a:t>
+              <a:t>A useful framing: data quality is always relative to the study question. A 10% rate of unmapped drug codes may have little effect on a study that uses no drug data, and it can undermine a pharmacoepidemiology study. The ALSFRS-R is the example to return to through the program. LOINC has a code for the scale (82954-9), for the total score (82953-1), and for each item, so the concept exists. Whether any structured records exist is a separate question, and at many sites the answer is few or none because the scores live in clinic notes. That is a completeness problem with a known cause, and it is different from an unmapped code.</a:t>
             </a:r>
           </a:p>
         </p:txBody>
@@ -872,7 +872,7 @@
           <a:lstStyle/>
           <a:p>
             <a:r>
-              <a:t>Have one participant share their screen for the build. Focus discussion on the Included Source Codes tab: which source codes appear, and would you have expected all of them? What happens if a site's drug codes are in a vocabulary that does not appear there?</a:t>
+              <a:t>Have one participant share their screen for the build. Focus discussion on the Included Source Codes tab: which source codes appear, and would you have expected all of them? What happens if a site's drug codes are in a vocabulary that does not appear there? As a second concept set for Day 3, search for the SNOMED concept 'Motor neuron disease' (SNOMED code 37340000), add it with Descendants, and read the Included Concepts tab: amyotrophic lateral sclerosis and the other terms below it are listed. Classification concepts still deserve a mention here: riluzole sits under the ATC class N07XX (other nervous system drugs), which is too broad to use as an ALS medication set, so this lab lists the ingredients.</a:t>
             </a:r>
           </a:p>
         </p:txBody>
@@ -5061,7 +5061,7 @@
           <a:p>
             <a:pPr/>
             <a:r>
-              <a:t>Examples: 'All sulfonylureas' · 'Type 2 diabetes mellitus' · 'Amyotrophic lateral sclerosis'</a:t>
+              <a:t>Examples: 'ALS medications' · 'Motor neuron disease' · 'ALSFRS-R items'</a:t>
             </a:r>
           </a:p>
           <a:p>
@@ -5230,7 +5230,7 @@
             <a:pPr/>
             <a:r>
               <a:rPr sz="1600"/>
-              <a:t>Example: a sulfonylurea ingredient such as glipizide lists the NDC and other source drug codes that map to its products</a:t>
+              <a:t>Example: the riluzole ingredient lists the NDC and other source drug codes that map to its products</a:t>
             </a:r>
           </a:p>
           <a:p>
@@ -5313,7 +5313,7 @@
             <a:pPr/>
             <a:r>
               <a:rPr sz="1600"/>
-              <a:t>Example: the metformin ingredient has many descendants (products, strengths, combinations); count them at your site with the Day 1 concept_ancestor query</a:t>
+              <a:t>Example: the riluzole ingredient has descendants (products, strengths, branded versions); count them at your site with the Day 1 concept_ancestor query</a:t>
             </a:r>
           </a:p>
           <a:p>
@@ -5327,7 +5327,7 @@
             <a:pPr/>
             <a:r>
               <a:rPr sz="1600"/>
-              <a:t>You would miss the clinical and branded drugs, such as metformin 500 MG oral tablet and its branded versions</a:t>
+              <a:t>You would miss the clinical and branded drugs, such as riluzole 50 MG oral tablet and its branded versions</a:t>
             </a:r>
           </a:p>
           <a:p>
@@ -5442,7 +5442,7 @@
             </a:pPr>
             <a:r>
               <a:rPr sz="1800"/>
-              <a:t>2. Name it: 'TtT Day2 Sulfonylureas [your initials]'</a:t>
+              <a:t>2. Name it: 'TtT Day2 ALS medications [your initials]'</a:t>
             </a:r>
           </a:p>
           <a:p>
@@ -5451,7 +5451,7 @@
             </a:pPr>
             <a:r>
               <a:rPr sz="1800"/>
-              <a:t>3. Search for 'sulfonylureas' → find the ATC class concept (A10BB), which is a Classification concept</a:t>
+              <a:t>3. Search for 'riluzole' → find the RxNorm ingredient (Standard); repeat for 'edaravone'</a:t>
             </a:r>
           </a:p>
           <a:p>
@@ -5469,7 +5469,7 @@
             </a:pPr>
             <a:r>
               <a:rPr sz="1800"/>
-              <a:t>5. Open Included Concepts: the class shows Classification and its drug descendants show Standard. Count the descendants</a:t>
+              <a:t>5. Open Included Concepts: the ingredients and the products below them show Standard. Count the descendants</a:t>
             </a:r>
           </a:p>
           <a:p>
@@ -5562,7 +5562,7 @@
               <a:rPr sz="1600">
                 <a:latin typeface="Courier New"/>
               </a:rPr>
-              <a:t>-- Count drug exposures for sulfonylureas using ancestor join</a:t>
+              <a:t>-- Count drug exposures for riluzole using ancestor join</a:t>
             </a:r>
           </a:p>
           <a:p>
@@ -5573,7 +5573,7 @@
               <a:rPr sz="1600">
                 <a:latin typeface="Courier New"/>
               </a:rPr>
-              <a:t>-- Replace [sulfonylurea_class_id] with the concept_id from Atlas</a:t>
+              <a:t>-- Replace [riluzole_ingredient_id] with the concept_id from Atlas</a:t>
             </a:r>
           </a:p>
           <a:p>
@@ -5650,7 +5650,7 @@
               <a:rPr sz="1600">
                 <a:latin typeface="Courier New"/>
               </a:rPr>
-              <a:t>WHERE ca.ancestor_concept_id = [sulfonylurea_class_id];</a:t>
+              <a:t>WHERE ca.ancestor_concept_id = [riluzole_ingredient_id];</a:t>
             </a:r>
           </a:p>
           <a:p>
@@ -6857,6 +6857,13 @@
             <a:r>
               <a:rPr sz="1600"/>
               <a:t>Under-coding: conditions present clinically but not recorded</a:t>
+            </a:r>
+          </a:p>
+          <a:p>
+            <a:pPr lvl="1"/>
+            <a:r>
+              <a:rPr sz="1600"/>
+              <a:t>Information kept in notes: scores such as the ALSFRS-R have LOINC codes, and at many sites they are written in clinic notes and never reach a structured table</a:t>
             </a:r>
           </a:p>
           <a:p>
